--- a/artifacts/speaking-portfolio-expanded/talks/benchmarks/benchmarks-40min-screen.pptx
+++ b/artifacts/speaking-portfolio-expanded/talks/benchmarks/benchmarks-40min-screen.pptx
@@ -5509,7 +5509,7 @@
                 <a:ea typeface="Arial"/>
                 <a:cs typeface="Arial"/>
               </a:rPr>
-              <a:t xml:space="preserve">![Twenty for Twenty, One in Seven](../../reveal-talks/assets/benchmarks/bound.svg)</a:t>
+              <a:t xml:space="preserve">![Twenty for Twenty, One in Seven](../../../../public/talks/assets/benchmarks/bound.svg)</a:t>
             </a:r>
             <a:endParaRPr lang="en-US" sz="1200"/>
           </a:p>
